--- a/en/slides/22-Computer_Architecture-Verm1_Part_4.pptx
+++ b/en/slides/22-Computer_Architecture-Verm1_Part_4.pptx
@@ -118,7 +118,7 @@
   <p:extLst>
     <p:ext uri="{521415D9-36F7-43E2-AB2F-B90AF26B5E84}">
       <p14:sectionLst xmlns:p14="http://schemas.microsoft.com/office/powerpoint/2010/main">
-        <p14:section name="Opening" id="{f05a47ba-3a7e-cea3-d0cf-bb828b41de39}">
+        <p14:section name="Opening" id="{46637d1e-8136-ae61-9534-3a576f6ac14a}">
           <p14:sldIdLst>
             <p14:sldId id="256"/>
             <p14:sldId id="257"/>
@@ -126,22 +126,22 @@
             <p14:sldId id="259"/>
           </p14:sldIdLst>
         </p14:section>
-        <p14:section name="Step 1: the score in digits" id="{ebf40985-d476-dd8f-dc1b-0f8b7cd44cd6}">
+        <p14:section name="Step 1: the score in digits" id="{24b18b2a-e63c-6ec2-a79d-a4d573fe6d53}">
           <p14:sldIdLst>
             <p14:sldId id="260"/>
           </p14:sldIdLst>
         </p14:section>
-        <p14:section name="Step 2: levels" id="{cd46db40-3eb2-ea53-0d23-ccd2af701105}">
+        <p14:section name="Step 2: levels" id="{d556948e-9bc3-dba7-e95c-eee6f17ffed4}">
           <p14:sldIdLst>
             <p14:sldId id="261"/>
           </p14:sldIdLst>
         </p14:section>
-        <p14:section name="Step 4: draw only what changed" id="{7fb934c2-3206-d131-4e94-c9fb6c82ad8b}">
+        <p14:section name="Step 4: draw only what changed" id="{ebfb7ede-783d-7702-ad58-4d65bb2784a0}">
           <p14:sldIdLst>
             <p14:sldId id="262"/>
           </p14:sldIdLst>
         </p14:section>
-        <p14:section name="Step 5: measure" id="{e9ecaa66-c73b-24e5-29f6-3e15dfee2fa4}">
+        <p14:section name="Step 5: measure" id="{c839ad5c-778e-f98c-d208-5d6897e007be}">
           <p14:sldIdLst>
             <p14:sldId id="263"/>
             <p14:sldId id="264"/>
@@ -2606,7 +2606,63 @@
       </p:sp>
       <p:sp>
         <p:nvSpPr>
-          <p:cNvPr id="13" name="Shape 11"/>
+          <p:cNvPr id="13" name="Text 11"/>
+          <p:cNvSpPr txBox="1"/>
+          <p:nvPr/>
+        </p:nvSpPr>
+        <p:spPr>
+          <a:xfrm>
+            <a:off x="4693615" y="566928"/>
+            <a:ext cx="6949440" cy="640080"/>
+          </a:xfrm>
+          <a:prstGeom prst="rect">
+            <a:avLst/>
+          </a:prstGeom>
+          <a:noFill/>
+          <a:ln/>
+        </p:spPr>
+        <p:txBody>
+          <a:bodyPr wrap="square" lIns="0" tIns="0" rIns="0" bIns="0" rtlCol="0" anchor="t"/>
+          <a:lstStyle/>
+          <a:p>
+            <a:pPr algn="r" indent="0" marL="0">
+              <a:buNone/>
+            </a:pPr>
+            <a:r>
+              <a:rPr lang="en-US" sz="1300" dirty="0">
+                <a:solidFill>
+                  <a:srgbClr val="CFE3EA"/>
+                </a:solidFill>
+                <a:latin typeface="Calibri" pitchFamily="34" charset="0"/>
+                <a:ea typeface="Calibri" pitchFamily="34" charset="-122"/>
+                <a:cs typeface="Calibri" pitchFamily="34" charset="-120"/>
+              </a:rPr>
+              <a:t>Lecture deck. The listings, the complete program and how to test it are in the code deck:</a:t>
+            </a:r>
+            <a:endParaRPr lang="en-US" sz="1300" dirty="0"/>
+          </a:p>
+          <a:p>
+            <a:pPr algn="r" indent="0" marL="0">
+              <a:buNone/>
+            </a:pPr>
+            <a:r>
+              <a:rPr lang="en-US" sz="1300" dirty="0">
+                <a:solidFill>
+                  <a:srgbClr val="CFE3EA"/>
+                </a:solidFill>
+                <a:latin typeface="Calibri" pitchFamily="34" charset="0"/>
+                <a:ea typeface="Calibri" pitchFamily="34" charset="-122"/>
+                <a:cs typeface="Calibri" pitchFamily="34" charset="-120"/>
+              </a:rPr>
+              <a:t>22-Computer_Architecture-Verm1_Part_4-Code.pptx</a:t>
+            </a:r>
+            <a:endParaRPr lang="en-US" sz="1300" dirty="0"/>
+          </a:p>
+        </p:txBody>
+      </p:sp>
+      <p:sp>
+        <p:nvSpPr>
+          <p:cNvPr id="14" name="Shape 12"/>
           <p:cNvSpPr/>
           <p:nvPr/>
         </p:nvSpPr>
@@ -2633,7 +2689,7 @@
       </p:sp>
       <p:pic>
         <p:nvPicPr>
-          <p:cNvPr id="14" name="Image 0" descr="/Users/raffaelemontella/devel/riscv-prg32/computer-architecture-with-prg32/tools/assets/verm1_p4_play.png">    </p:cNvPr>
+          <p:cNvPr id="15" name="Image 0" descr="/Users/raffaelemontella/devel/riscv-prg32/computer-architecture-with-prg32/tools/assets/verm1_p4_play.png">    </p:cNvPr>
           <p:cNvPicPr>
             <a:picLocks noChangeAspect="1"/>
           </p:cNvPicPr>

--- a/en/slides/22-Computer_Architecture-Verm1_Part_4.pptx
+++ b/en/slides/22-Computer_Architecture-Verm1_Part_4.pptx
@@ -118,7 +118,7 @@
   <p:extLst>
     <p:ext uri="{521415D9-36F7-43E2-AB2F-B90AF26B5E84}">
       <p14:sectionLst xmlns:p14="http://schemas.microsoft.com/office/powerpoint/2010/main">
-        <p14:section name="Opening" id="{46637d1e-8136-ae61-9534-3a576f6ac14a}">
+        <p14:section name="Opening" id="{c51cecaa-f18f-e96e-a798-5c30bd99362c}">
           <p14:sldIdLst>
             <p14:sldId id="256"/>
             <p14:sldId id="257"/>
@@ -126,22 +126,22 @@
             <p14:sldId id="259"/>
           </p14:sldIdLst>
         </p14:section>
-        <p14:section name="Step 1: the score in digits" id="{24b18b2a-e63c-6ec2-a79d-a4d573fe6d53}">
+        <p14:section name="Step 1: the score in digits" id="{f08afc9f-bc67-cc8e-37ee-d094ee8cc005}">
           <p14:sldIdLst>
             <p14:sldId id="260"/>
           </p14:sldIdLst>
         </p14:section>
-        <p14:section name="Step 2: levels" id="{d556948e-9bc3-dba7-e95c-eee6f17ffed4}">
+        <p14:section name="Step 2: levels" id="{08f15b97-10fb-b435-fb94-4afc90ba9969}">
           <p14:sldIdLst>
             <p14:sldId id="261"/>
           </p14:sldIdLst>
         </p14:section>
-        <p14:section name="Step 4: draw only what changed" id="{ebfb7ede-783d-7702-ad58-4d65bb2784a0}">
+        <p14:section name="Step 4: draw only what changed" id="{8c756942-e7e7-7f92-d9d2-c686c501e810}">
           <p14:sldIdLst>
             <p14:sldId id="262"/>
           </p14:sldIdLst>
         </p14:section>
-        <p14:section name="Step 5: measure" id="{c839ad5c-778e-f98c-d208-5d6897e007be}">
+        <p14:section name="Step 5: measure" id="{755f4c04-b357-3abf-618d-b28b86db9ba1}">
           <p14:sldIdLst>
             <p14:sldId id="263"/>
             <p14:sldId id="264"/>
@@ -555,6 +555,8 @@
             <a:r>
               <a:rPr lang="en-US" dirty="0"/>
               <a:t>The fourth and last tutorial finishes Verm1. In Part 3 the game was complete in its rules; today it becomes complete as a program. The score is written in digits, the worm accelerates, there are two sounds, and the screen is redrawn only where it changes. Knuth's sentence on the cover explains the order of the work: first the game was made to work, and only now, with a measure in hand, do we make it fast.
+Learning status: UNDERSTAND NOW, by the end of this lecture you explain it, trace it and apply it on your own; USE NOW, you follow and use the recipe today; how it works inside is explained later, or is not part of the course; UNDERSTAND LATER, recognise the name and what it is for; a later lecture explains it. A slide without a badge is context: a story, an example, a question, an exercise.
+Learning status of this lecture. UNDERSTAND NOW: quotient and remainder; characters and strings; fixed point; the calling convention; arrays in memory; finite-state machines; the frame buffer; the processor cycle. USE NOW: the PRG32 tools, the PRG32-QT debugger (used, not studied, in this course). UNDERSTAND LATER: nothing. A slide without a badge is context: a story, an example, a question, an exercise.
 For the lecturer: Fourth project tutorial. It uses Lectures 18 to 21: the registers by convention, the stack, multiplication and division (18), the processor cycle and the cost of an instruction (19), the frame buffer and what drawing costs (20), input, sound and the runtime as the owner of the devices (21). The reference file is verm1/verm1_part4.S. Knuth's sentence is the right motto: the game was made to work in Part 3, and only now, with a measure in hand, do we make it fast.</a:t>
             </a:r>
             <a:endParaRPr lang="en-US" dirty="0"/>
@@ -826,6 +828,7 @@
             <a:r>
               <a:rPr lang="en-US" dirty="0"/>
               <a:t>Verm1 is finished: about six hundred lines of RISC-V assembly, all yours. It began as three functions that return and grew one runnable step at a time, and every part of the course is in it: numbers, logic, state, memory, calls, pixels, devices. One thing is missing: a program that only its author can run is half finished. The next lecture gives it a name, an icon and credits, and publishes it.
+Learning status, recap. UNDERSTAND NOW: quotient and remainder; characters and strings; fixed point; the calling convention; arrays in memory; finite-state machines; the frame buffer; the processor cycle. USE NOW: the PRG32 tools, the PRG32-QT debugger (used, not studied, in this course). UNDERSTAND LATER: nothing. A slide without a badge is context: a story, an example, a question, an exercise.
 For the lecturer: Ask the students to bring their own variant to Lecture 23: the bundle they prepare should be of their game, not of the reference.</a:t>
             </a:r>
             <a:endParaRPr lang="en-US" dirty="0"/>
@@ -1181,6 +1184,7 @@
             <a:r>
               <a:rPr lang="en-US" dirty="0"/>
               <a:t>The variable score holds a binary number: 137 is the byte 0x89. The screen wants three characters, the bytes 0x31, 0x33 and 0x37. The conversion is the one you did by hand in Lecture 05: divide by ten, and the remainder is a digit; repeat on the quotient. The digits come out from the right, units first, so they are stored from the last character to the first. A digit becomes a character by adding 48, the ASCII code of the character zero.
+UNDERSTAND NOW: quotient and remainder.
 For the lecturer: The conversion of Lecture 05, done by the program instead of by hand. remu gives the remainder, divu the quotient: two instructions of the M extension.</a:t>
             </a:r>
             <a:endParaRPr lang="en-US" dirty="0"/>
@@ -1270,6 +1274,7 @@
             <a:r>
               <a:rPr lang="en-US" dirty="0"/>
               <a:t>The levels in numbers. For each score, the speed, the frames per step, which is 256 divided by the speed, and the cells per second at thirty frames per second. From 3.75 cells per second at the start to 11.25 from sixteen points on. The frames per step are not always whole numbers, and it is not a problem: at 48 the steps come every five or six frames, 5.33 on average. This is what fixed point gives you.
+UNDERSTAND NOW: fixed point.
 For the lecturer: 256 divided by the speed gives the frames per step; the frame rate times the speed divided by 256 gives the cells per second. Ask the students for the row of score 2.</a:t>
             </a:r>
             <a:endParaRPr lang="en-US" dirty="0"/>
@@ -1359,6 +1364,7 @@
             <a:r>
               <a:rPr lang="en-US" dirty="0"/>
               <a:t>What does a frame of Part 3 cost? It clears 64,000 pixels and redraws title, score, worm and food, thirty times per second. Yet between two steps nothing changes on the screen, and a step changes very little: the cell the tail left, the old head that becomes body, the new head, and sometimes the food and the score. So remember what changed and draw only that. It works because the frame buffer is memory: the picture stays there by itself.
+UNDERSTAND NOW: the frame buffer.
 For the lecturer: Lecture 20: the screen is an array of pixels that keeps its content. A worm of 200 cells costs 200 rectangles per frame in Part 3 and three per step in Part 4. This is what the old home computers did, because they had no choice.</a:t>
             </a:r>
             <a:endParaRPr lang="en-US" dirty="0"/>
@@ -1448,6 +1454,7 @@
             <a:r>
               <a:rPr lang="en-US" dirty="0"/>
               <a:t>Six actions. Run the finished game in debug mode and start a game. Read the telemetry for ten seconds. Compare with the numbers of Part 3 that you wrote down at the beginning. Let the worm grow to twenty cells in both versions and read again: in one the cost grows with the worm, in the other it does not. Put a breakpoint on draw_changes and check that it stops once per step. Write the numbers down: they go into the description of your game.
+UNDERSTAND NOW: the processor cycle. USE NOW: the PRG32-QT debugger (used, not studied, in this course).
 For the lecturer: The telemetry counts the instructions of the cartridge, not those of the runtime that fills the rectangles, so the real saving on the board is larger than the count shows: there every pixel also travels over SPI to the display. Do not quote numbers to the students: let them measure.</a:t>
             </a:r>
             <a:endParaRPr lang="en-US" dirty="0"/>
@@ -1537,6 +1544,7 @@
             <a:r>
               <a:rPr lang="en-US" dirty="0"/>
               <a:t>Follow a call with the debugger. Stop on the call to to_decimal and read a0, a1, ra and sp. One step: the PC jumps into the function and ra holds the address of the instruction after the call. Step through: only temporaries change and sp never moves, because it is a leaf. At ret the PC takes the value of ra. Then do the same with draw_text: sp goes down by 16, ra is stored and comes back.
+UNDERSTAND NOW: the calling convention. USE NOW: the PRG32-QT debugger (used, not studied, in this course).
 For the lecturer: The calling convention of Lecture 18, watched instruction by instruction. In the listing call appears as jal, or as auipc followed by jalr, and ret as c.jr ra.</a:t>
             </a:r>
             <a:endParaRPr lang="en-US" dirty="0"/>
@@ -2713,6 +2721,420 @@
       </p:pic>
       <p:sp>
         <p:nvSpPr>
+          <p:cNvPr id="16" name="Shape 13"/>
+          <p:cNvSpPr/>
+          <p:nvPr/>
+        </p:nvSpPr>
+        <p:spPr>
+          <a:xfrm>
+            <a:off x="9690303" y="91440"/>
+            <a:ext cx="1952752" cy="274320"/>
+          </a:xfrm>
+          <a:prstGeom prst="rect">
+            <a:avLst/>
+          </a:prstGeom>
+          <a:solidFill>
+            <a:srgbClr val="F3E8FF"/>
+          </a:solidFill>
+          <a:ln w="12700">
+            <a:solidFill>
+              <a:srgbClr val="7E22CE"/>
+            </a:solidFill>
+            <a:prstDash val="dash"/>
+          </a:ln>
+        </p:spPr>
+      </p:sp>
+      <p:sp>
+        <p:nvSpPr>
+          <p:cNvPr id="17" name="Shape 14"/>
+          <p:cNvSpPr/>
+          <p:nvPr/>
+        </p:nvSpPr>
+        <p:spPr>
+          <a:xfrm>
+            <a:off x="9717735" y="128016"/>
+            <a:ext cx="45720" cy="45720"/>
+          </a:xfrm>
+          <a:prstGeom prst="rect">
+            <a:avLst/>
+          </a:prstGeom>
+          <a:solidFill>
+            <a:srgbClr val="7E22CE"/>
+          </a:solidFill>
+          <a:ln w="12700">
+            <a:solidFill>
+              <a:srgbClr val="7E22CE"/>
+            </a:solidFill>
+            <a:prstDash val="solid"/>
+          </a:ln>
+        </p:spPr>
+      </p:sp>
+      <p:sp>
+        <p:nvSpPr>
+          <p:cNvPr id="18" name="Shape 15"/>
+          <p:cNvSpPr/>
+          <p:nvPr/>
+        </p:nvSpPr>
+        <p:spPr>
+          <a:xfrm>
+            <a:off x="9717735" y="205740"/>
+            <a:ext cx="45720" cy="45720"/>
+          </a:xfrm>
+          <a:prstGeom prst="rect">
+            <a:avLst/>
+          </a:prstGeom>
+          <a:solidFill>
+            <a:srgbClr val="7E22CE"/>
+          </a:solidFill>
+          <a:ln w="12700">
+            <a:solidFill>
+              <a:srgbClr val="7E22CE"/>
+            </a:solidFill>
+            <a:prstDash val="solid"/>
+          </a:ln>
+        </p:spPr>
+      </p:sp>
+      <p:sp>
+        <p:nvSpPr>
+          <p:cNvPr id="19" name="Shape 16"/>
+          <p:cNvSpPr/>
+          <p:nvPr/>
+        </p:nvSpPr>
+        <p:spPr>
+          <a:xfrm>
+            <a:off x="9717735" y="283464"/>
+            <a:ext cx="45720" cy="45720"/>
+          </a:xfrm>
+          <a:prstGeom prst="rect">
+            <a:avLst/>
+          </a:prstGeom>
+          <a:solidFill>
+            <a:srgbClr val="7E22CE"/>
+          </a:solidFill>
+          <a:ln w="12700">
+            <a:solidFill>
+              <a:srgbClr val="7E22CE"/>
+            </a:solidFill>
+            <a:prstDash val="solid"/>
+          </a:ln>
+        </p:spPr>
+      </p:sp>
+      <p:pic>
+        <p:nvPicPr>
+          <p:cNvPr id="20" name="Image 1" descr="preencoded.png">    </p:cNvPr>
+          <p:cNvPicPr>
+            <a:picLocks noChangeAspect="1"/>
+          </p:cNvPicPr>
+          <p:nvPr/>
+        </p:nvPicPr>
+        <p:blipFill>
+          <a:blip r:embed="rId2"/>
+          <a:stretch>
+            <a:fillRect/>
+          </a:stretch>
+        </p:blipFill>
+        <p:spPr>
+          <a:xfrm>
+            <a:off x="9818319" y="128016"/>
+            <a:ext cx="201168" cy="201168"/>
+          </a:xfrm>
+          <a:prstGeom prst="rect">
+            <a:avLst/>
+          </a:prstGeom>
+        </p:spPr>
+      </p:pic>
+      <p:sp>
+        <p:nvSpPr>
+          <p:cNvPr id="21" name="Text 17"/>
+          <p:cNvSpPr txBox="1"/>
+          <p:nvPr/>
+        </p:nvSpPr>
+        <p:spPr>
+          <a:xfrm>
+            <a:off x="10074351" y="91440"/>
+            <a:ext cx="1532128" cy="274320"/>
+          </a:xfrm>
+          <a:prstGeom prst="rect">
+            <a:avLst/>
+          </a:prstGeom>
+          <a:noFill/>
+          <a:ln/>
+        </p:spPr>
+        <p:txBody>
+          <a:bodyPr wrap="square" lIns="0" tIns="0" rIns="0" bIns="0" rtlCol="0" anchor="ctr"/>
+          <a:lstStyle/>
+          <a:p>
+            <a:pPr indent="0" marL="0">
+              <a:buNone/>
+            </a:pPr>
+            <a:r>
+              <a:rPr lang="en-US" sz="1100" b="1" dirty="0">
+                <a:solidFill>
+                  <a:srgbClr val="6B21A8"/>
+                </a:solidFill>
+                <a:latin typeface="Calibri" pitchFamily="34" charset="0"/>
+                <a:ea typeface="Calibri" pitchFamily="34" charset="-122"/>
+                <a:cs typeface="Calibri" pitchFamily="34" charset="-120"/>
+              </a:rPr>
+              <a:t>UNDERSTAND LATER</a:t>
+            </a:r>
+            <a:endParaRPr lang="en-US" sz="1100" dirty="0"/>
+          </a:p>
+        </p:txBody>
+      </p:sp>
+      <p:sp>
+        <p:nvSpPr>
+          <p:cNvPr id="22" name="Shape 18"/>
+          <p:cNvSpPr/>
+          <p:nvPr/>
+        </p:nvSpPr>
+        <p:spPr>
+          <a:xfrm>
+            <a:off x="8407349" y="91440"/>
+            <a:ext cx="1173226" cy="274320"/>
+          </a:xfrm>
+          <a:prstGeom prst="rect">
+            <a:avLst/>
+          </a:prstGeom>
+          <a:solidFill>
+            <a:srgbClr val="FEF3C7"/>
+          </a:solidFill>
+          <a:ln w="12700">
+            <a:solidFill>
+              <a:srgbClr val="B45309"/>
+            </a:solidFill>
+            <a:prstDash val="solid"/>
+          </a:ln>
+        </p:spPr>
+      </p:sp>
+      <p:sp>
+        <p:nvSpPr>
+          <p:cNvPr id="23" name="Shape 19"/>
+          <p:cNvSpPr/>
+          <p:nvPr/>
+        </p:nvSpPr>
+        <p:spPr>
+          <a:xfrm>
+            <a:off x="8407349" y="91440"/>
+            <a:ext cx="27432" cy="274320"/>
+          </a:xfrm>
+          <a:prstGeom prst="rect">
+            <a:avLst/>
+          </a:prstGeom>
+          <a:solidFill>
+            <a:srgbClr val="B45309"/>
+          </a:solidFill>
+          <a:ln w="12700">
+            <a:solidFill>
+              <a:srgbClr val="B45309"/>
+            </a:solidFill>
+            <a:prstDash val="solid"/>
+          </a:ln>
+        </p:spPr>
+      </p:sp>
+      <p:sp>
+        <p:nvSpPr>
+          <p:cNvPr id="24" name="Shape 20"/>
+          <p:cNvSpPr/>
+          <p:nvPr/>
+        </p:nvSpPr>
+        <p:spPr>
+          <a:xfrm>
+            <a:off x="8462213" y="91440"/>
+            <a:ext cx="27432" cy="274320"/>
+          </a:xfrm>
+          <a:prstGeom prst="rect">
+            <a:avLst/>
+          </a:prstGeom>
+          <a:solidFill>
+            <a:srgbClr val="B45309"/>
+          </a:solidFill>
+          <a:ln w="12700">
+            <a:solidFill>
+              <a:srgbClr val="B45309"/>
+            </a:solidFill>
+            <a:prstDash val="solid"/>
+          </a:ln>
+        </p:spPr>
+      </p:sp>
+      <p:pic>
+        <p:nvPicPr>
+          <p:cNvPr id="25" name="Image 2" descr="preencoded.png">    </p:cNvPr>
+          <p:cNvPicPr>
+            <a:picLocks noChangeAspect="1"/>
+          </p:cNvPicPr>
+          <p:nvPr/>
+        </p:nvPicPr>
+        <p:blipFill>
+          <a:blip r:embed="rId3"/>
+          <a:stretch>
+            <a:fillRect/>
+          </a:stretch>
+        </p:blipFill>
+        <p:spPr>
+          <a:xfrm>
+            <a:off x="8535365" y="128016"/>
+            <a:ext cx="201168" cy="201168"/>
+          </a:xfrm>
+          <a:prstGeom prst="rect">
+            <a:avLst/>
+          </a:prstGeom>
+        </p:spPr>
+      </p:pic>
+      <p:sp>
+        <p:nvSpPr>
+          <p:cNvPr id="26" name="Text 21"/>
+          <p:cNvSpPr txBox="1"/>
+          <p:nvPr/>
+        </p:nvSpPr>
+        <p:spPr>
+          <a:xfrm>
+            <a:off x="8791397" y="91440"/>
+            <a:ext cx="752602" cy="274320"/>
+          </a:xfrm>
+          <a:prstGeom prst="rect">
+            <a:avLst/>
+          </a:prstGeom>
+          <a:noFill/>
+          <a:ln/>
+        </p:spPr>
+        <p:txBody>
+          <a:bodyPr wrap="square" lIns="0" tIns="0" rIns="0" bIns="0" rtlCol="0" anchor="ctr"/>
+          <a:lstStyle/>
+          <a:p>
+            <a:pPr indent="0" marL="0">
+              <a:buNone/>
+            </a:pPr>
+            <a:r>
+              <a:rPr lang="en-US" sz="1100" b="1" dirty="0">
+                <a:solidFill>
+                  <a:srgbClr val="92400E"/>
+                </a:solidFill>
+                <a:latin typeface="Calibri" pitchFamily="34" charset="0"/>
+                <a:ea typeface="Calibri" pitchFamily="34" charset="-122"/>
+                <a:cs typeface="Calibri" pitchFamily="34" charset="-120"/>
+              </a:rPr>
+              <a:t>USE NOW</a:t>
+            </a:r>
+            <a:endParaRPr lang="en-US" sz="1100" dirty="0"/>
+          </a:p>
+        </p:txBody>
+      </p:sp>
+      <p:sp>
+        <p:nvSpPr>
+          <p:cNvPr id="27" name="Shape 22"/>
+          <p:cNvSpPr/>
+          <p:nvPr/>
+        </p:nvSpPr>
+        <p:spPr>
+          <a:xfrm>
+            <a:off x="6518097" y="91440"/>
+            <a:ext cx="1779524" cy="274320"/>
+          </a:xfrm>
+          <a:prstGeom prst="rect">
+            <a:avLst/>
+          </a:prstGeom>
+          <a:solidFill>
+            <a:srgbClr val="E0F2FE"/>
+          </a:solidFill>
+          <a:ln w="12700">
+            <a:solidFill>
+              <a:srgbClr val="0369A1"/>
+            </a:solidFill>
+            <a:prstDash val="solid"/>
+          </a:ln>
+        </p:spPr>
+      </p:sp>
+      <p:sp>
+        <p:nvSpPr>
+          <p:cNvPr id="28" name="Shape 23"/>
+          <p:cNvSpPr/>
+          <p:nvPr/>
+        </p:nvSpPr>
+        <p:spPr>
+          <a:xfrm>
+            <a:off x="6518097" y="91440"/>
+            <a:ext cx="73152" cy="274320"/>
+          </a:xfrm>
+          <a:prstGeom prst="rect">
+            <a:avLst/>
+          </a:prstGeom>
+          <a:solidFill>
+            <a:srgbClr val="0369A1"/>
+          </a:solidFill>
+          <a:ln w="12700">
+            <a:solidFill>
+              <a:srgbClr val="0369A1"/>
+            </a:solidFill>
+            <a:prstDash val="solid"/>
+          </a:ln>
+        </p:spPr>
+      </p:sp>
+      <p:pic>
+        <p:nvPicPr>
+          <p:cNvPr id="29" name="Image 3" descr="preencoded.png">    </p:cNvPr>
+          <p:cNvPicPr>
+            <a:picLocks noChangeAspect="1"/>
+          </p:cNvPicPr>
+          <p:nvPr/>
+        </p:nvPicPr>
+        <p:blipFill>
+          <a:blip r:embed="rId4"/>
+          <a:stretch>
+            <a:fillRect/>
+          </a:stretch>
+        </p:blipFill>
+        <p:spPr>
+          <a:xfrm>
+            <a:off x="6646113" y="128016"/>
+            <a:ext cx="201168" cy="201168"/>
+          </a:xfrm>
+          <a:prstGeom prst="rect">
+            <a:avLst/>
+          </a:prstGeom>
+        </p:spPr>
+      </p:pic>
+      <p:sp>
+        <p:nvSpPr>
+          <p:cNvPr id="30" name="Text 24"/>
+          <p:cNvSpPr txBox="1"/>
+          <p:nvPr/>
+        </p:nvSpPr>
+        <p:spPr>
+          <a:xfrm>
+            <a:off x="6902145" y="91440"/>
+            <a:ext cx="1358900" cy="274320"/>
+          </a:xfrm>
+          <a:prstGeom prst="rect">
+            <a:avLst/>
+          </a:prstGeom>
+          <a:noFill/>
+          <a:ln/>
+        </p:spPr>
+        <p:txBody>
+          <a:bodyPr wrap="square" lIns="0" tIns="0" rIns="0" bIns="0" rtlCol="0" anchor="ctr"/>
+          <a:lstStyle/>
+          <a:p>
+            <a:pPr indent="0" marL="0">
+              <a:buNone/>
+            </a:pPr>
+            <a:r>
+              <a:rPr lang="en-US" sz="1100" b="1" dirty="0">
+                <a:solidFill>
+                  <a:srgbClr val="075985"/>
+                </a:solidFill>
+                <a:latin typeface="Calibri" pitchFamily="34" charset="0"/>
+                <a:ea typeface="Calibri" pitchFamily="34" charset="-122"/>
+                <a:cs typeface="Calibri" pitchFamily="34" charset="-120"/>
+              </a:rPr>
+              <a:t>UNDERSTAND NOW</a:t>
+            </a:r>
+            <a:endParaRPr lang="en-US" sz="1100" dirty="0"/>
+          </a:p>
+        </p:txBody>
+      </p:sp>
+      <p:sp>
+        <p:nvSpPr>
           <p:cNvPr id="25" name="Slide Number Placeholder 0"/>
           <p:cNvSpPr>
             <a:spLocks noGrp="1"/>
@@ -8514,6 +8936,133 @@
               <a:t>0x89 in memory; 0x31 0x33 0x37 on the screen</a:t>
             </a:r>
             <a:endParaRPr lang="en-US" sz="1900" dirty="0"/>
+          </a:p>
+        </p:txBody>
+      </p:sp>
+      <p:sp>
+        <p:nvSpPr>
+          <p:cNvPr id="16" name="Shape 14"/>
+          <p:cNvSpPr/>
+          <p:nvPr/>
+        </p:nvSpPr>
+        <p:spPr>
+          <a:xfrm>
+            <a:off x="8222056" y="91440"/>
+            <a:ext cx="3420999" cy="274320"/>
+          </a:xfrm>
+          <a:prstGeom prst="rect">
+            <a:avLst/>
+          </a:prstGeom>
+          <a:solidFill>
+            <a:srgbClr val="E0F2FE"/>
+          </a:solidFill>
+          <a:ln w="12700">
+            <a:solidFill>
+              <a:srgbClr val="0369A1"/>
+            </a:solidFill>
+            <a:prstDash val="solid"/>
+          </a:ln>
+        </p:spPr>
+      </p:sp>
+      <p:sp>
+        <p:nvSpPr>
+          <p:cNvPr id="17" name="Shape 15"/>
+          <p:cNvSpPr/>
+          <p:nvPr/>
+        </p:nvSpPr>
+        <p:spPr>
+          <a:xfrm>
+            <a:off x="8222056" y="91440"/>
+            <a:ext cx="73152" cy="274320"/>
+          </a:xfrm>
+          <a:prstGeom prst="rect">
+            <a:avLst/>
+          </a:prstGeom>
+          <a:solidFill>
+            <a:srgbClr val="0369A1"/>
+          </a:solidFill>
+          <a:ln w="12700">
+            <a:solidFill>
+              <a:srgbClr val="0369A1"/>
+            </a:solidFill>
+            <a:prstDash val="solid"/>
+          </a:ln>
+        </p:spPr>
+      </p:sp>
+      <p:pic>
+        <p:nvPicPr>
+          <p:cNvPr id="18" name="Image 0" descr="preencoded.png">    </p:cNvPr>
+          <p:cNvPicPr>
+            <a:picLocks noChangeAspect="1"/>
+          </p:cNvPicPr>
+          <p:nvPr/>
+        </p:nvPicPr>
+        <p:blipFill>
+          <a:blip r:embed="rId1"/>
+          <a:stretch>
+            <a:fillRect/>
+          </a:stretch>
+        </p:blipFill>
+        <p:spPr>
+          <a:xfrm>
+            <a:off x="8350072" y="128016"/>
+            <a:ext cx="201168" cy="201168"/>
+          </a:xfrm>
+          <a:prstGeom prst="rect">
+            <a:avLst/>
+          </a:prstGeom>
+        </p:spPr>
+      </p:pic>
+      <p:sp>
+        <p:nvSpPr>
+          <p:cNvPr id="19" name="Text 16"/>
+          <p:cNvSpPr txBox="1"/>
+          <p:nvPr/>
+        </p:nvSpPr>
+        <p:spPr>
+          <a:xfrm>
+            <a:off x="8606104" y="91440"/>
+            <a:ext cx="3000375" cy="274320"/>
+          </a:xfrm>
+          <a:prstGeom prst="rect">
+            <a:avLst/>
+          </a:prstGeom>
+          <a:noFill/>
+          <a:ln/>
+        </p:spPr>
+        <p:txBody>
+          <a:bodyPr wrap="square" lIns="0" tIns="0" rIns="0" bIns="0" rtlCol="0" anchor="ctr"/>
+          <a:lstStyle/>
+          <a:p>
+            <a:pPr indent="0" marL="0">
+              <a:buNone/>
+            </a:pPr>
+            <a:r>
+              <a:rPr lang="en-US" sz="1100" b="1" dirty="0">
+                <a:solidFill>
+                  <a:srgbClr val="075985"/>
+                </a:solidFill>
+                <a:latin typeface="Calibri" pitchFamily="34" charset="0"/>
+                <a:ea typeface="Calibri" pitchFamily="34" charset="-122"/>
+                <a:cs typeface="Calibri" pitchFamily="34" charset="-120"/>
+              </a:rPr>
+              <a:t>UNDERSTAND NOW</a:t>
+            </a:r>
+            <a:pPr indent="0" marL="0">
+              <a:buNone/>
+            </a:pPr>
+            <a:r>
+              <a:rPr lang="en-US" sz="1100" dirty="0">
+                <a:solidFill>
+                  <a:srgbClr val="075985"/>
+                </a:solidFill>
+                <a:latin typeface="Calibri" pitchFamily="34" charset="0"/>
+                <a:ea typeface="Calibri" pitchFamily="34" charset="-122"/>
+                <a:cs typeface="Calibri" pitchFamily="34" charset="-120"/>
+              </a:rPr>
+              <a:t> · quotient and remainder</a:t>
+            </a:r>
+            <a:endParaRPr lang="en-US" sz="1100" dirty="0"/>
           </a:p>
         </p:txBody>
       </p:sp>
@@ -10348,6 +10897,133 @@
       </p:sp>
       <p:sp>
         <p:nvSpPr>
+          <p:cNvPr id="5" name="Shape 2"/>
+          <p:cNvSpPr/>
+          <p:nvPr/>
+        </p:nvSpPr>
+        <p:spPr>
+          <a:xfrm>
+            <a:off x="8944305" y="91440"/>
+            <a:ext cx="2698750" cy="274320"/>
+          </a:xfrm>
+          <a:prstGeom prst="rect">
+            <a:avLst/>
+          </a:prstGeom>
+          <a:solidFill>
+            <a:srgbClr val="E0F2FE"/>
+          </a:solidFill>
+          <a:ln w="12700">
+            <a:solidFill>
+              <a:srgbClr val="0369A1"/>
+            </a:solidFill>
+            <a:prstDash val="solid"/>
+          </a:ln>
+        </p:spPr>
+      </p:sp>
+      <p:sp>
+        <p:nvSpPr>
+          <p:cNvPr id="6" name="Shape 3"/>
+          <p:cNvSpPr/>
+          <p:nvPr/>
+        </p:nvSpPr>
+        <p:spPr>
+          <a:xfrm>
+            <a:off x="8944305" y="91440"/>
+            <a:ext cx="73152" cy="274320"/>
+          </a:xfrm>
+          <a:prstGeom prst="rect">
+            <a:avLst/>
+          </a:prstGeom>
+          <a:solidFill>
+            <a:srgbClr val="0369A1"/>
+          </a:solidFill>
+          <a:ln w="12700">
+            <a:solidFill>
+              <a:srgbClr val="0369A1"/>
+            </a:solidFill>
+            <a:prstDash val="solid"/>
+          </a:ln>
+        </p:spPr>
+      </p:sp>
+      <p:pic>
+        <p:nvPicPr>
+          <p:cNvPr id="7" name="Image 0" descr="preencoded.png">    </p:cNvPr>
+          <p:cNvPicPr>
+            <a:picLocks noChangeAspect="1"/>
+          </p:cNvPicPr>
+          <p:nvPr/>
+        </p:nvPicPr>
+        <p:blipFill>
+          <a:blip r:embed="rId1"/>
+          <a:stretch>
+            <a:fillRect/>
+          </a:stretch>
+        </p:blipFill>
+        <p:spPr>
+          <a:xfrm>
+            <a:off x="9072321" y="128016"/>
+            <a:ext cx="201168" cy="201168"/>
+          </a:xfrm>
+          <a:prstGeom prst="rect">
+            <a:avLst/>
+          </a:prstGeom>
+        </p:spPr>
+      </p:pic>
+      <p:sp>
+        <p:nvSpPr>
+          <p:cNvPr id="8" name="Text 4"/>
+          <p:cNvSpPr txBox="1"/>
+          <p:nvPr/>
+        </p:nvSpPr>
+        <p:spPr>
+          <a:xfrm>
+            <a:off x="9328353" y="91440"/>
+            <a:ext cx="2278126" cy="274320"/>
+          </a:xfrm>
+          <a:prstGeom prst="rect">
+            <a:avLst/>
+          </a:prstGeom>
+          <a:noFill/>
+          <a:ln/>
+        </p:spPr>
+        <p:txBody>
+          <a:bodyPr wrap="square" lIns="0" tIns="0" rIns="0" bIns="0" rtlCol="0" anchor="ctr"/>
+          <a:lstStyle/>
+          <a:p>
+            <a:pPr indent="0" marL="0">
+              <a:buNone/>
+            </a:pPr>
+            <a:r>
+              <a:rPr lang="en-US" sz="1100" b="1" dirty="0">
+                <a:solidFill>
+                  <a:srgbClr val="075985"/>
+                </a:solidFill>
+                <a:latin typeface="Calibri" pitchFamily="34" charset="0"/>
+                <a:ea typeface="Calibri" pitchFamily="34" charset="-122"/>
+                <a:cs typeface="Calibri" pitchFamily="34" charset="-120"/>
+              </a:rPr>
+              <a:t>UNDERSTAND NOW</a:t>
+            </a:r>
+            <a:pPr indent="0" marL="0">
+              <a:buNone/>
+            </a:pPr>
+            <a:r>
+              <a:rPr lang="en-US" sz="1100" dirty="0">
+                <a:solidFill>
+                  <a:srgbClr val="075985"/>
+                </a:solidFill>
+                <a:latin typeface="Calibri" pitchFamily="34" charset="0"/>
+                <a:ea typeface="Calibri" pitchFamily="34" charset="-122"/>
+                <a:cs typeface="Calibri" pitchFamily="34" charset="-120"/>
+              </a:rPr>
+              <a:t> · fixed point</a:t>
+            </a:r>
+            <a:endParaRPr lang="en-US" sz="1100" dirty="0"/>
+          </a:p>
+        </p:txBody>
+      </p:sp>
+      <p:sp>
+        <p:nvSpPr>
           <p:cNvPr id="25" name="Slide Number Placeholder 0"/>
           <p:cNvSpPr>
             <a:spLocks noGrp="1"/>
@@ -10962,6 +11638,133 @@
       </p:sp>
       <p:sp>
         <p:nvSpPr>
+          <p:cNvPr id="16" name="Shape 14"/>
+          <p:cNvSpPr/>
+          <p:nvPr/>
+        </p:nvSpPr>
+        <p:spPr>
+          <a:xfrm>
+            <a:off x="8616010" y="91440"/>
+            <a:ext cx="3027045" cy="274320"/>
+          </a:xfrm>
+          <a:prstGeom prst="rect">
+            <a:avLst/>
+          </a:prstGeom>
+          <a:solidFill>
+            <a:srgbClr val="E0F2FE"/>
+          </a:solidFill>
+          <a:ln w="12700">
+            <a:solidFill>
+              <a:srgbClr val="0369A1"/>
+            </a:solidFill>
+            <a:prstDash val="solid"/>
+          </a:ln>
+        </p:spPr>
+      </p:sp>
+      <p:sp>
+        <p:nvSpPr>
+          <p:cNvPr id="17" name="Shape 15"/>
+          <p:cNvSpPr/>
+          <p:nvPr/>
+        </p:nvSpPr>
+        <p:spPr>
+          <a:xfrm>
+            <a:off x="8616010" y="91440"/>
+            <a:ext cx="73152" cy="274320"/>
+          </a:xfrm>
+          <a:prstGeom prst="rect">
+            <a:avLst/>
+          </a:prstGeom>
+          <a:solidFill>
+            <a:srgbClr val="0369A1"/>
+          </a:solidFill>
+          <a:ln w="12700">
+            <a:solidFill>
+              <a:srgbClr val="0369A1"/>
+            </a:solidFill>
+            <a:prstDash val="solid"/>
+          </a:ln>
+        </p:spPr>
+      </p:sp>
+      <p:pic>
+        <p:nvPicPr>
+          <p:cNvPr id="18" name="Image 0" descr="preencoded.png">    </p:cNvPr>
+          <p:cNvPicPr>
+            <a:picLocks noChangeAspect="1"/>
+          </p:cNvPicPr>
+          <p:nvPr/>
+        </p:nvPicPr>
+        <p:blipFill>
+          <a:blip r:embed="rId1"/>
+          <a:stretch>
+            <a:fillRect/>
+          </a:stretch>
+        </p:blipFill>
+        <p:spPr>
+          <a:xfrm>
+            <a:off x="8744026" y="128016"/>
+            <a:ext cx="201168" cy="201168"/>
+          </a:xfrm>
+          <a:prstGeom prst="rect">
+            <a:avLst/>
+          </a:prstGeom>
+        </p:spPr>
+      </p:pic>
+      <p:sp>
+        <p:nvSpPr>
+          <p:cNvPr id="19" name="Text 16"/>
+          <p:cNvSpPr txBox="1"/>
+          <p:nvPr/>
+        </p:nvSpPr>
+        <p:spPr>
+          <a:xfrm>
+            <a:off x="9000058" y="91440"/>
+            <a:ext cx="2606421" cy="274320"/>
+          </a:xfrm>
+          <a:prstGeom prst="rect">
+            <a:avLst/>
+          </a:prstGeom>
+          <a:noFill/>
+          <a:ln/>
+        </p:spPr>
+        <p:txBody>
+          <a:bodyPr wrap="square" lIns="0" tIns="0" rIns="0" bIns="0" rtlCol="0" anchor="ctr"/>
+          <a:lstStyle/>
+          <a:p>
+            <a:pPr indent="0" marL="0">
+              <a:buNone/>
+            </a:pPr>
+            <a:r>
+              <a:rPr lang="en-US" sz="1100" b="1" dirty="0">
+                <a:solidFill>
+                  <a:srgbClr val="075985"/>
+                </a:solidFill>
+                <a:latin typeface="Calibri" pitchFamily="34" charset="0"/>
+                <a:ea typeface="Calibri" pitchFamily="34" charset="-122"/>
+                <a:cs typeface="Calibri" pitchFamily="34" charset="-120"/>
+              </a:rPr>
+              <a:t>UNDERSTAND NOW</a:t>
+            </a:r>
+            <a:pPr indent="0" marL="0">
+              <a:buNone/>
+            </a:pPr>
+            <a:r>
+              <a:rPr lang="en-US" sz="1100" dirty="0">
+                <a:solidFill>
+                  <a:srgbClr val="075985"/>
+                </a:solidFill>
+                <a:latin typeface="Calibri" pitchFamily="34" charset="0"/>
+                <a:ea typeface="Calibri" pitchFamily="34" charset="-122"/>
+                <a:cs typeface="Calibri" pitchFamily="34" charset="-120"/>
+              </a:rPr>
+              <a:t> · the frame buffer</a:t>
+            </a:r>
+            <a:endParaRPr lang="en-US" sz="1100" dirty="0"/>
+          </a:p>
+        </p:txBody>
+      </p:sp>
+      <p:sp>
+        <p:nvSpPr>
           <p:cNvPr id="25" name="Slide Number Placeholder 0"/>
           <p:cNvSpPr>
             <a:spLocks noGrp="1"/>
@@ -11610,6 +12413,285 @@
       </p:sp>
       <p:sp>
         <p:nvSpPr>
+          <p:cNvPr id="15" name="Shape 13"/>
+          <p:cNvSpPr/>
+          <p:nvPr/>
+        </p:nvSpPr>
+        <p:spPr>
+          <a:xfrm>
+            <a:off x="8894013" y="91440"/>
+            <a:ext cx="2749042" cy="274320"/>
+          </a:xfrm>
+          <a:prstGeom prst="rect">
+            <a:avLst/>
+          </a:prstGeom>
+          <a:solidFill>
+            <a:srgbClr val="FEF3C7"/>
+          </a:solidFill>
+          <a:ln w="12700">
+            <a:solidFill>
+              <a:srgbClr val="B45309"/>
+            </a:solidFill>
+            <a:prstDash val="solid"/>
+          </a:ln>
+        </p:spPr>
+      </p:sp>
+      <p:sp>
+        <p:nvSpPr>
+          <p:cNvPr id="16" name="Shape 14"/>
+          <p:cNvSpPr/>
+          <p:nvPr/>
+        </p:nvSpPr>
+        <p:spPr>
+          <a:xfrm>
+            <a:off x="8894013" y="91440"/>
+            <a:ext cx="27432" cy="274320"/>
+          </a:xfrm>
+          <a:prstGeom prst="rect">
+            <a:avLst/>
+          </a:prstGeom>
+          <a:solidFill>
+            <a:srgbClr val="B45309"/>
+          </a:solidFill>
+          <a:ln w="12700">
+            <a:solidFill>
+              <a:srgbClr val="B45309"/>
+            </a:solidFill>
+            <a:prstDash val="solid"/>
+          </a:ln>
+        </p:spPr>
+      </p:sp>
+      <p:sp>
+        <p:nvSpPr>
+          <p:cNvPr id="17" name="Shape 15"/>
+          <p:cNvSpPr/>
+          <p:nvPr/>
+        </p:nvSpPr>
+        <p:spPr>
+          <a:xfrm>
+            <a:off x="8948877" y="91440"/>
+            <a:ext cx="27432" cy="274320"/>
+          </a:xfrm>
+          <a:prstGeom prst="rect">
+            <a:avLst/>
+          </a:prstGeom>
+          <a:solidFill>
+            <a:srgbClr val="B45309"/>
+          </a:solidFill>
+          <a:ln w="12700">
+            <a:solidFill>
+              <a:srgbClr val="B45309"/>
+            </a:solidFill>
+            <a:prstDash val="solid"/>
+          </a:ln>
+        </p:spPr>
+      </p:sp>
+      <p:pic>
+        <p:nvPicPr>
+          <p:cNvPr id="18" name="Image 0" descr="preencoded.png">    </p:cNvPr>
+          <p:cNvPicPr>
+            <a:picLocks noChangeAspect="1"/>
+          </p:cNvPicPr>
+          <p:nvPr/>
+        </p:nvPicPr>
+        <p:blipFill>
+          <a:blip r:embed="rId1"/>
+          <a:stretch>
+            <a:fillRect/>
+          </a:stretch>
+        </p:blipFill>
+        <p:spPr>
+          <a:xfrm>
+            <a:off x="9022029" y="128016"/>
+            <a:ext cx="201168" cy="201168"/>
+          </a:xfrm>
+          <a:prstGeom prst="rect">
+            <a:avLst/>
+          </a:prstGeom>
+        </p:spPr>
+      </p:pic>
+      <p:sp>
+        <p:nvSpPr>
+          <p:cNvPr id="19" name="Text 16"/>
+          <p:cNvSpPr txBox="1"/>
+          <p:nvPr/>
+        </p:nvSpPr>
+        <p:spPr>
+          <a:xfrm>
+            <a:off x="9278061" y="91440"/>
+            <a:ext cx="2328418" cy="274320"/>
+          </a:xfrm>
+          <a:prstGeom prst="rect">
+            <a:avLst/>
+          </a:prstGeom>
+          <a:noFill/>
+          <a:ln/>
+        </p:spPr>
+        <p:txBody>
+          <a:bodyPr wrap="square" lIns="0" tIns="0" rIns="0" bIns="0" rtlCol="0" anchor="ctr"/>
+          <a:lstStyle/>
+          <a:p>
+            <a:pPr indent="0" marL="0">
+              <a:buNone/>
+            </a:pPr>
+            <a:r>
+              <a:rPr lang="en-US" sz="1100" b="1" dirty="0">
+                <a:solidFill>
+                  <a:srgbClr val="92400E"/>
+                </a:solidFill>
+                <a:latin typeface="Calibri" pitchFamily="34" charset="0"/>
+                <a:ea typeface="Calibri" pitchFamily="34" charset="-122"/>
+                <a:cs typeface="Calibri" pitchFamily="34" charset="-120"/>
+              </a:rPr>
+              <a:t>USE NOW</a:t>
+            </a:r>
+            <a:pPr indent="0" marL="0">
+              <a:buNone/>
+            </a:pPr>
+            <a:r>
+              <a:rPr lang="en-US" sz="1100" dirty="0">
+                <a:solidFill>
+                  <a:srgbClr val="92400E"/>
+                </a:solidFill>
+                <a:latin typeface="Calibri" pitchFamily="34" charset="0"/>
+                <a:ea typeface="Calibri" pitchFamily="34" charset="-122"/>
+                <a:cs typeface="Calibri" pitchFamily="34" charset="-120"/>
+              </a:rPr>
+              <a:t> · the PRG32-QT debugger</a:t>
+            </a:r>
+            <a:endParaRPr lang="en-US" sz="1100" dirty="0"/>
+          </a:p>
+        </p:txBody>
+      </p:sp>
+      <p:sp>
+        <p:nvSpPr>
+          <p:cNvPr id="20" name="Shape 17"/>
+          <p:cNvSpPr/>
+          <p:nvPr/>
+        </p:nvSpPr>
+        <p:spPr>
+          <a:xfrm>
+            <a:off x="5560263" y="91440"/>
+            <a:ext cx="3224022" cy="274320"/>
+          </a:xfrm>
+          <a:prstGeom prst="rect">
+            <a:avLst/>
+          </a:prstGeom>
+          <a:solidFill>
+            <a:srgbClr val="E0F2FE"/>
+          </a:solidFill>
+          <a:ln w="12700">
+            <a:solidFill>
+              <a:srgbClr val="0369A1"/>
+            </a:solidFill>
+            <a:prstDash val="solid"/>
+          </a:ln>
+        </p:spPr>
+      </p:sp>
+      <p:sp>
+        <p:nvSpPr>
+          <p:cNvPr id="21" name="Shape 18"/>
+          <p:cNvSpPr/>
+          <p:nvPr/>
+        </p:nvSpPr>
+        <p:spPr>
+          <a:xfrm>
+            <a:off x="5560263" y="91440"/>
+            <a:ext cx="73152" cy="274320"/>
+          </a:xfrm>
+          <a:prstGeom prst="rect">
+            <a:avLst/>
+          </a:prstGeom>
+          <a:solidFill>
+            <a:srgbClr val="0369A1"/>
+          </a:solidFill>
+          <a:ln w="12700">
+            <a:solidFill>
+              <a:srgbClr val="0369A1"/>
+            </a:solidFill>
+            <a:prstDash val="solid"/>
+          </a:ln>
+        </p:spPr>
+      </p:sp>
+      <p:pic>
+        <p:nvPicPr>
+          <p:cNvPr id="22" name="Image 1" descr="preencoded.png">    </p:cNvPr>
+          <p:cNvPicPr>
+            <a:picLocks noChangeAspect="1"/>
+          </p:cNvPicPr>
+          <p:nvPr/>
+        </p:nvPicPr>
+        <p:blipFill>
+          <a:blip r:embed="rId2"/>
+          <a:stretch>
+            <a:fillRect/>
+          </a:stretch>
+        </p:blipFill>
+        <p:spPr>
+          <a:xfrm>
+            <a:off x="5688279" y="128016"/>
+            <a:ext cx="201168" cy="201168"/>
+          </a:xfrm>
+          <a:prstGeom prst="rect">
+            <a:avLst/>
+          </a:prstGeom>
+        </p:spPr>
+      </p:pic>
+      <p:sp>
+        <p:nvSpPr>
+          <p:cNvPr id="23" name="Text 19"/>
+          <p:cNvSpPr txBox="1"/>
+          <p:nvPr/>
+        </p:nvSpPr>
+        <p:spPr>
+          <a:xfrm>
+            <a:off x="5944311" y="91440"/>
+            <a:ext cx="2803398" cy="274320"/>
+          </a:xfrm>
+          <a:prstGeom prst="rect">
+            <a:avLst/>
+          </a:prstGeom>
+          <a:noFill/>
+          <a:ln/>
+        </p:spPr>
+        <p:txBody>
+          <a:bodyPr wrap="square" lIns="0" tIns="0" rIns="0" bIns="0" rtlCol="0" anchor="ctr"/>
+          <a:lstStyle/>
+          <a:p>
+            <a:pPr indent="0" marL="0">
+              <a:buNone/>
+            </a:pPr>
+            <a:r>
+              <a:rPr lang="en-US" sz="1100" b="1" dirty="0">
+                <a:solidFill>
+                  <a:srgbClr val="075985"/>
+                </a:solidFill>
+                <a:latin typeface="Calibri" pitchFamily="34" charset="0"/>
+                <a:ea typeface="Calibri" pitchFamily="34" charset="-122"/>
+                <a:cs typeface="Calibri" pitchFamily="34" charset="-120"/>
+              </a:rPr>
+              <a:t>UNDERSTAND NOW</a:t>
+            </a:r>
+            <a:pPr indent="0" marL="0">
+              <a:buNone/>
+            </a:pPr>
+            <a:r>
+              <a:rPr lang="en-US" sz="1100" dirty="0">
+                <a:solidFill>
+                  <a:srgbClr val="075985"/>
+                </a:solidFill>
+                <a:latin typeface="Calibri" pitchFamily="34" charset="0"/>
+                <a:ea typeface="Calibri" pitchFamily="34" charset="-122"/>
+                <a:cs typeface="Calibri" pitchFamily="34" charset="-120"/>
+              </a:rPr>
+              <a:t> · the processor cycle</a:t>
+            </a:r>
+            <a:endParaRPr lang="en-US" sz="1100" dirty="0"/>
+          </a:p>
+        </p:txBody>
+      </p:sp>
+      <p:sp>
+        <p:nvSpPr>
           <p:cNvPr id="25" name="Slide Number Placeholder 0"/>
           <p:cNvSpPr>
             <a:spLocks noGrp="1"/>
@@ -12117,6 +13199,285 @@
               <a:t>PRG32-QT: listing, registers, memory</a:t>
             </a:r>
             <a:endParaRPr lang="en-US" sz="1200" dirty="0"/>
+          </a:p>
+        </p:txBody>
+      </p:sp>
+      <p:sp>
+        <p:nvSpPr>
+          <p:cNvPr id="15" name="Shape 12"/>
+          <p:cNvSpPr/>
+          <p:nvPr/>
+        </p:nvSpPr>
+        <p:spPr>
+          <a:xfrm>
+            <a:off x="8894013" y="91440"/>
+            <a:ext cx="2749042" cy="274320"/>
+          </a:xfrm>
+          <a:prstGeom prst="rect">
+            <a:avLst/>
+          </a:prstGeom>
+          <a:solidFill>
+            <a:srgbClr val="FEF3C7"/>
+          </a:solidFill>
+          <a:ln w="12700">
+            <a:solidFill>
+              <a:srgbClr val="B45309"/>
+            </a:solidFill>
+            <a:prstDash val="solid"/>
+          </a:ln>
+        </p:spPr>
+      </p:sp>
+      <p:sp>
+        <p:nvSpPr>
+          <p:cNvPr id="16" name="Shape 13"/>
+          <p:cNvSpPr/>
+          <p:nvPr/>
+        </p:nvSpPr>
+        <p:spPr>
+          <a:xfrm>
+            <a:off x="8894013" y="91440"/>
+            <a:ext cx="27432" cy="274320"/>
+          </a:xfrm>
+          <a:prstGeom prst="rect">
+            <a:avLst/>
+          </a:prstGeom>
+          <a:solidFill>
+            <a:srgbClr val="B45309"/>
+          </a:solidFill>
+          <a:ln w="12700">
+            <a:solidFill>
+              <a:srgbClr val="B45309"/>
+            </a:solidFill>
+            <a:prstDash val="solid"/>
+          </a:ln>
+        </p:spPr>
+      </p:sp>
+      <p:sp>
+        <p:nvSpPr>
+          <p:cNvPr id="17" name="Shape 14"/>
+          <p:cNvSpPr/>
+          <p:nvPr/>
+        </p:nvSpPr>
+        <p:spPr>
+          <a:xfrm>
+            <a:off x="8948877" y="91440"/>
+            <a:ext cx="27432" cy="274320"/>
+          </a:xfrm>
+          <a:prstGeom prst="rect">
+            <a:avLst/>
+          </a:prstGeom>
+          <a:solidFill>
+            <a:srgbClr val="B45309"/>
+          </a:solidFill>
+          <a:ln w="12700">
+            <a:solidFill>
+              <a:srgbClr val="B45309"/>
+            </a:solidFill>
+            <a:prstDash val="solid"/>
+          </a:ln>
+        </p:spPr>
+      </p:sp>
+      <p:pic>
+        <p:nvPicPr>
+          <p:cNvPr id="18" name="Image 1" descr="preencoded.png">    </p:cNvPr>
+          <p:cNvPicPr>
+            <a:picLocks noChangeAspect="1"/>
+          </p:cNvPicPr>
+          <p:nvPr/>
+        </p:nvPicPr>
+        <p:blipFill>
+          <a:blip r:embed="rId2"/>
+          <a:stretch>
+            <a:fillRect/>
+          </a:stretch>
+        </p:blipFill>
+        <p:spPr>
+          <a:xfrm>
+            <a:off x="9022029" y="128016"/>
+            <a:ext cx="201168" cy="201168"/>
+          </a:xfrm>
+          <a:prstGeom prst="rect">
+            <a:avLst/>
+          </a:prstGeom>
+        </p:spPr>
+      </p:pic>
+      <p:sp>
+        <p:nvSpPr>
+          <p:cNvPr id="19" name="Text 15"/>
+          <p:cNvSpPr txBox="1"/>
+          <p:nvPr/>
+        </p:nvSpPr>
+        <p:spPr>
+          <a:xfrm>
+            <a:off x="9278061" y="91440"/>
+            <a:ext cx="2328418" cy="274320"/>
+          </a:xfrm>
+          <a:prstGeom prst="rect">
+            <a:avLst/>
+          </a:prstGeom>
+          <a:noFill/>
+          <a:ln/>
+        </p:spPr>
+        <p:txBody>
+          <a:bodyPr wrap="square" lIns="0" tIns="0" rIns="0" bIns="0" rtlCol="0" anchor="ctr"/>
+          <a:lstStyle/>
+          <a:p>
+            <a:pPr indent="0" marL="0">
+              <a:buNone/>
+            </a:pPr>
+            <a:r>
+              <a:rPr lang="en-US" sz="1100" b="1" dirty="0">
+                <a:solidFill>
+                  <a:srgbClr val="92400E"/>
+                </a:solidFill>
+                <a:latin typeface="Calibri" pitchFamily="34" charset="0"/>
+                <a:ea typeface="Calibri" pitchFamily="34" charset="-122"/>
+                <a:cs typeface="Calibri" pitchFamily="34" charset="-120"/>
+              </a:rPr>
+              <a:t>USE NOW</a:t>
+            </a:r>
+            <a:pPr indent="0" marL="0">
+              <a:buNone/>
+            </a:pPr>
+            <a:r>
+              <a:rPr lang="en-US" sz="1100" dirty="0">
+                <a:solidFill>
+                  <a:srgbClr val="92400E"/>
+                </a:solidFill>
+                <a:latin typeface="Calibri" pitchFamily="34" charset="0"/>
+                <a:ea typeface="Calibri" pitchFamily="34" charset="-122"/>
+                <a:cs typeface="Calibri" pitchFamily="34" charset="-120"/>
+              </a:rPr>
+              <a:t> · the PRG32-QT debugger</a:t>
+            </a:r>
+            <a:endParaRPr lang="en-US" sz="1100" dirty="0"/>
+          </a:p>
+        </p:txBody>
+      </p:sp>
+      <p:sp>
+        <p:nvSpPr>
+          <p:cNvPr id="20" name="Shape 16"/>
+          <p:cNvSpPr/>
+          <p:nvPr/>
+        </p:nvSpPr>
+        <p:spPr>
+          <a:xfrm>
+            <a:off x="5363286" y="91440"/>
+            <a:ext cx="3420999" cy="274320"/>
+          </a:xfrm>
+          <a:prstGeom prst="rect">
+            <a:avLst/>
+          </a:prstGeom>
+          <a:solidFill>
+            <a:srgbClr val="E0F2FE"/>
+          </a:solidFill>
+          <a:ln w="12700">
+            <a:solidFill>
+              <a:srgbClr val="0369A1"/>
+            </a:solidFill>
+            <a:prstDash val="solid"/>
+          </a:ln>
+        </p:spPr>
+      </p:sp>
+      <p:sp>
+        <p:nvSpPr>
+          <p:cNvPr id="21" name="Shape 17"/>
+          <p:cNvSpPr/>
+          <p:nvPr/>
+        </p:nvSpPr>
+        <p:spPr>
+          <a:xfrm>
+            <a:off x="5363286" y="91440"/>
+            <a:ext cx="73152" cy="274320"/>
+          </a:xfrm>
+          <a:prstGeom prst="rect">
+            <a:avLst/>
+          </a:prstGeom>
+          <a:solidFill>
+            <a:srgbClr val="0369A1"/>
+          </a:solidFill>
+          <a:ln w="12700">
+            <a:solidFill>
+              <a:srgbClr val="0369A1"/>
+            </a:solidFill>
+            <a:prstDash val="solid"/>
+          </a:ln>
+        </p:spPr>
+      </p:sp>
+      <p:pic>
+        <p:nvPicPr>
+          <p:cNvPr id="22" name="Image 2" descr="preencoded.png">    </p:cNvPr>
+          <p:cNvPicPr>
+            <a:picLocks noChangeAspect="1"/>
+          </p:cNvPicPr>
+          <p:nvPr/>
+        </p:nvPicPr>
+        <p:blipFill>
+          <a:blip r:embed="rId3"/>
+          <a:stretch>
+            <a:fillRect/>
+          </a:stretch>
+        </p:blipFill>
+        <p:spPr>
+          <a:xfrm>
+            <a:off x="5491302" y="128016"/>
+            <a:ext cx="201168" cy="201168"/>
+          </a:xfrm>
+          <a:prstGeom prst="rect">
+            <a:avLst/>
+          </a:prstGeom>
+        </p:spPr>
+      </p:pic>
+      <p:sp>
+        <p:nvSpPr>
+          <p:cNvPr id="23" name="Text 18"/>
+          <p:cNvSpPr txBox="1"/>
+          <p:nvPr/>
+        </p:nvSpPr>
+        <p:spPr>
+          <a:xfrm>
+            <a:off x="5747334" y="91440"/>
+            <a:ext cx="3000375" cy="274320"/>
+          </a:xfrm>
+          <a:prstGeom prst="rect">
+            <a:avLst/>
+          </a:prstGeom>
+          <a:noFill/>
+          <a:ln/>
+        </p:spPr>
+        <p:txBody>
+          <a:bodyPr wrap="square" lIns="0" tIns="0" rIns="0" bIns="0" rtlCol="0" anchor="ctr"/>
+          <a:lstStyle/>
+          <a:p>
+            <a:pPr indent="0" marL="0">
+              <a:buNone/>
+            </a:pPr>
+            <a:r>
+              <a:rPr lang="en-US" sz="1100" b="1" dirty="0">
+                <a:solidFill>
+                  <a:srgbClr val="075985"/>
+                </a:solidFill>
+                <a:latin typeface="Calibri" pitchFamily="34" charset="0"/>
+                <a:ea typeface="Calibri" pitchFamily="34" charset="-122"/>
+                <a:cs typeface="Calibri" pitchFamily="34" charset="-120"/>
+              </a:rPr>
+              <a:t>UNDERSTAND NOW</a:t>
+            </a:r>
+            <a:pPr indent="0" marL="0">
+              <a:buNone/>
+            </a:pPr>
+            <a:r>
+              <a:rPr lang="en-US" sz="1100" dirty="0">
+                <a:solidFill>
+                  <a:srgbClr val="075985"/>
+                </a:solidFill>
+                <a:latin typeface="Calibri" pitchFamily="34" charset="0"/>
+                <a:ea typeface="Calibri" pitchFamily="34" charset="-122"/>
+                <a:cs typeface="Calibri" pitchFamily="34" charset="-120"/>
+              </a:rPr>
+              <a:t> · the calling convention</a:t>
+            </a:r>
+            <a:endParaRPr lang="en-US" sz="1100" dirty="0"/>
           </a:p>
         </p:txBody>
       </p:sp>

--- a/en/slides/22-Computer_Architecture-Verm1_Part_4.pptx
+++ b/en/slides/22-Computer_Architecture-Verm1_Part_4.pptx
@@ -118,7 +118,7 @@
   <p:extLst>
     <p:ext uri="{521415D9-36F7-43E2-AB2F-B90AF26B5E84}">
       <p14:sectionLst xmlns:p14="http://schemas.microsoft.com/office/powerpoint/2010/main">
-        <p14:section name="Opening" id="{c51cecaa-f18f-e96e-a798-5c30bd99362c}">
+        <p14:section name="Opening" id="{948e420f-a56d-ecdf-b7fb-14f947781201}">
           <p14:sldIdLst>
             <p14:sldId id="256"/>
             <p14:sldId id="257"/>
@@ -126,22 +126,22 @@
             <p14:sldId id="259"/>
           </p14:sldIdLst>
         </p14:section>
-        <p14:section name="Step 1: the score in digits" id="{f08afc9f-bc67-cc8e-37ee-d094ee8cc005}">
+        <p14:section name="Step 1: the score in digits" id="{3cf9767b-24ac-65fd-a2f5-7493a1723ef6}">
           <p14:sldIdLst>
             <p14:sldId id="260"/>
           </p14:sldIdLst>
         </p14:section>
-        <p14:section name="Step 2: levels" id="{08f15b97-10fb-b435-fb94-4afc90ba9969}">
+        <p14:section name="Step 2: levels" id="{be900426-cc8a-1fd8-b604-9e4ce462bb70}">
           <p14:sldIdLst>
             <p14:sldId id="261"/>
           </p14:sldIdLst>
         </p14:section>
-        <p14:section name="Step 4: draw only what changed" id="{8c756942-e7e7-7f92-d9d2-c686c501e810}">
+        <p14:section name="Step 4: draw only what changed" id="{79384e7a-fc15-8245-d4f1-b2b116fd930e}">
           <p14:sldIdLst>
             <p14:sldId id="262"/>
           </p14:sldIdLst>
         </p14:section>
-        <p14:section name="Step 5: measure" id="{755f4c04-b357-3abf-618d-b28b86db9ba1}">
+        <p14:section name="Step 5: measure" id="{8649258b-d076-70dd-ee85-b6554ad9c9f0}">
           <p14:sldIdLst>
             <p14:sldId id="263"/>
             <p14:sldId id="264"/>
@@ -1005,7 +1005,7 @@
           <a:p>
             <a:r>
               <a:rPr lang="en-US" dirty="0"/>
-              <a:t>The ideas of the last block of lectures, and where they appear today. The calling convention of Lecture 18 becomes small functions with a contract, some of them leaves. The M extension gives quotient and remainder for the digits. The processor cycle reminds us that every instruction costs time, so we measure. The screen as memory, from Lecture 20, suggests drawing only what changed. And from Lecture 21: the devices belong to the runtime, to which we ask for a note of a given duration.
+              <a:t>The ideas of the last block of lectures, and where they appear today. The calling convention of Lecture 18 becomes small functions with a contract, some of them leaves. The M extension, met in Lectures 05 and 06, gives quotient and remainder for the digits. The processor cycle reminds us that every instruction costs time, so we measure. The screen as memory, from Lecture 20, suggests drawing only what changed. And from Lecture 21: the devices belong to the runtime, to which we ask for a note of a given duration.
 For the lecturer: Lecture 04 comes back too: a digit becomes a character by adding 48, the ASCII code of '0'.</a:t>
             </a:r>
             <a:endParaRPr lang="en-US" dirty="0"/>
@@ -7092,7 +7092,7 @@
                           <a:ea typeface="Calibri" pitchFamily="34" charset="-122"/>
                           <a:cs typeface="Calibri" pitchFamily="34" charset="-120"/>
                         </a:rPr>
-                        <a:t>Lecture 18</a:t>
+                        <a:t>Lectures 05, 06</a:t>
                       </a:r>
                       <a:endParaRPr lang="en-US" sz="2100" dirty="0">
                         <a:latin typeface="Calibri" charset="0"/>
@@ -7160,7 +7160,7 @@
                           <a:ea typeface="Calibri" pitchFamily="34" charset="-122"/>
                           <a:cs typeface="Calibri" pitchFamily="34" charset="-120"/>
                         </a:rPr>
-                        <a:t>the M extension: divu and remu, quotient and remainder</a:t>
+                        <a:t>divu and remu (unsigned), the M of RV32IMAC: quotient and remainder</a:t>
                       </a:r>
                       <a:endParaRPr lang="en-US" sz="2100" dirty="0">
                         <a:latin typeface="Calibri" charset="0"/>

--- a/en/slides/22-Computer_Architecture-Verm1_Part_4.pptx
+++ b/en/slides/22-Computer_Architecture-Verm1_Part_4.pptx
@@ -118,7 +118,7 @@
   <p:extLst>
     <p:ext uri="{521415D9-36F7-43E2-AB2F-B90AF26B5E84}">
       <p14:sectionLst xmlns:p14="http://schemas.microsoft.com/office/powerpoint/2010/main">
-        <p14:section name="Opening" id="{948e420f-a56d-ecdf-b7fb-14f947781201}">
+        <p14:section name="Opening" id="{c43d4a33-b6a8-5aa9-c6e2-b6f8ab802c30}">
           <p14:sldIdLst>
             <p14:sldId id="256"/>
             <p14:sldId id="257"/>
@@ -126,22 +126,22 @@
             <p14:sldId id="259"/>
           </p14:sldIdLst>
         </p14:section>
-        <p14:section name="Step 1: the score in digits" id="{3cf9767b-24ac-65fd-a2f5-7493a1723ef6}">
+        <p14:section name="Step 1: the score in digits" id="{e558124a-32cb-5cf0-26fb-6f1f9f2f9446}">
           <p14:sldIdLst>
             <p14:sldId id="260"/>
           </p14:sldIdLst>
         </p14:section>
-        <p14:section name="Step 2: levels" id="{be900426-cc8a-1fd8-b604-9e4ce462bb70}">
+        <p14:section name="Step 2: levels" id="{030a5ed4-9e87-c748-9abb-5ccb8a30430f}">
           <p14:sldIdLst>
             <p14:sldId id="261"/>
           </p14:sldIdLst>
         </p14:section>
-        <p14:section name="Step 4: draw only what changed" id="{79384e7a-fc15-8245-d4f1-b2b116fd930e}">
+        <p14:section name="Step 4: draw only what changed" id="{976e891e-1af2-7e0e-df31-5702a2cf16db}">
           <p14:sldIdLst>
             <p14:sldId id="262"/>
           </p14:sldIdLst>
         </p14:section>
-        <p14:section name="Step 5: measure" id="{8649258b-d076-70dd-ee85-b6554ad9c9f0}">
+        <p14:section name="Step 5: measure" id="{d9c0c3f4-46b1-bdad-bf50-206c68d2ad00}">
           <p14:sldIdLst>
             <p14:sldId id="263"/>
             <p14:sldId id="264"/>
@@ -554,7 +554,7 @@
           <a:p>
             <a:r>
               <a:rPr lang="en-US" dirty="0"/>
-              <a:t>The fourth and last tutorial finishes Verm1. In Part 3 the game was complete in its rules; today it becomes complete as a program. The score is written in digits, the worm accelerates, there are two sounds, and the screen is redrawn only where it changes. Knuth's sentence on the cover explains the order of the work: first the game was made to work, and only now, with a measure in hand, do we make it fast.
+              <a:t>The fourth and final tutorial completes Verm1. At the end of Part 3 the game was complete in its rules; today it becomes complete as a program. The score is written in decimal digits, the worm accelerates, there are two sounds, and the screen is redrawn only where it changes. Knuth's sentence on the cover justifies the order of the work: first the game was made correct, and only now, with a measurement in hand, is it made fast. Optimisation without measurement is guesswork, and the tutorial ends by measuring the effect of its own changes.
 Learning status: UNDERSTAND NOW, by the end of this lecture you explain it, trace it and apply it on your own; USE NOW, you follow and use the recipe today; how it works inside is explained later, or is not part of the course; UNDERSTAND LATER, recognise the name and what it is for; a later lecture explains it. A slide without a badge is context: a story, an example, a question, an exercise.
 Learning status of this lecture. UNDERSTAND NOW: quotient and remainder; characters and strings; fixed point; the calling convention; arrays in memory; finite-state machines; the frame buffer; the processor cycle. USE NOW: the PRG32 tools, the PRG32-QT debugger (used, not studied, in this course). UNDERSTAND LATER: nothing. A slide without a badge is context: a story, an example, a question, an exercise.
 For the lecturer: Fourth project tutorial. It uses Lectures 18 to 21: the registers by convention, the stack, multiplication and division (18), the processor cycle and the cost of an instruction (19), the frame buffer and what drawing costs (20), input, sound and the runtime as the owner of the devices (21). The reference file is verm1/verm1_part4.S. Knuth's sentence is the right motto: the game was made to work in Part 3, and only now, with a measure in hand, do we make it fast.</a:t>
@@ -645,8 +645,8 @@
           <a:p>
             <a:r>
               <a:rPr lang="en-US" dirty="0"/>
-              <a:t>Convert 205 into three digits, then each digit into its ASCII code by adding 0x30. Mind the order: offset 0 holds the hundreds.
-One step every four frames means a speed of 256 divided by 4. Put that value into the formula of the speed and solve for the score.
+              <a:t>For the first question 205 is converted into three digits, and each digit into its ASCII code by adding 0x30. The order matters: offset 0 holds the hundreds.
+For the second: one step every four frames corresponds to a speed of 256 / 4. That value is substituted into the formula of the speed, and the equation solved for the score.
 For the lecturer: 1. Answer: B. The characters '2', '0', '5': 0x32, 0x30, 0x35. The units are stored at offset 2.
 2. Answer: B. One step every 4 frames is 64/256: 32 + 4 x score = 64, so score = 8.</a:t>
             </a:r>
@@ -736,8 +736,8 @@
           <a:p>
             <a:r>
               <a:rPr lang="en-US" dirty="0"/>
-              <a:t>Count the instructions of the shortest path of verm1_draw, remembering that la is a pseudo-instruction and expands into two.
-Ask what a stack frame is for: saving ra when there is another call, and saving the registers that must be preserved. Does to_decimal need either?
+              <a:t>For the first question the instructions on the shortest path through verm1_draw are counted, remembering that la is a pseudo-instruction that expands into two.
+For the second one asks what a stack frame is for: saving ra when a further call is made, and saving the callee-saved registers the function uses. The question is whether to_decimal requires either.
 For the lecturer: 1. Answer: B. la is two instructions, auipc and addi; then lw, beqz and ret.
 2. Answer: B. A leaf function that touches only caller-saved registers has nothing to save.</a:t>
             </a:r>
@@ -827,7 +827,7 @@
           <a:p>
             <a:r>
               <a:rPr lang="en-US" dirty="0"/>
-              <a:t>Verm1 is finished: about six hundred lines of RISC-V assembly, all yours. It began as three functions that return and grew one runnable step at a time, and every part of the course is in it: numbers, logic, state, memory, calls, pixels, devices. One thing is missing: a program that only its author can run is half finished. The next lecture gives it a name, an icon and credits, and publishes it.
+              <a:t>Verm1 is finished: about six hundred lines of RISC-V assembly, every one written by the student. It began as three functions that merely return and grew one runnable step at a time, and every part of the course is present in it: numbers, logic, state, memory, procedure calls, pixels and devices. One thing remains: a program that only its author can run is half finished. The next lecture gives it a name, an icon and credits, and publishes it.
 Learning status, recap. UNDERSTAND NOW: quotient and remainder; characters and strings; fixed point; the calling convention; arrays in memory; finite-state machines; the frame buffer; the processor cycle. USE NOW: the PRG32 tools, the PRG32-QT debugger (used, not studied, in this course). UNDERSTAND LATER: nothing. A slide without a badge is context: a story, an example, a question, an exercise.
 For the lecturer: Ask the students to bring their own variant to Lecture 23: the bundle they prepare should be of their game, not of the reference.</a:t>
             </a:r>
@@ -917,7 +917,7 @@
           <a:p>
             <a:r>
               <a:rPr lang="en-US" dirty="0"/>
-              <a:t>Five results. The score and the best score in digits, converted by a division by ten that you write. A worm that goes faster as the score grows, up to a limit. Two sounds, one for a meal and one for the end. A draw that touches a handful of cells per step instead of the whole screen. And a finished game, ready to be packaged and published in the next lecture.</a:t>
+              <a:t>Five outcomes. The score and the best score displayed in digits, converted by a division by ten written by the student. A worm that accelerates as the score grows, up to a limit. Two sounds, one for a meal and one for the end of the game. A draw function that touches a handful of cells per step instead of the whole screen. And a finished game, ready to be packaged and published in the next lecture.</a:t>
             </a:r>
             <a:endParaRPr lang="en-US" dirty="0"/>
           </a:p>
@@ -1005,7 +1005,7 @@
           <a:p>
             <a:r>
               <a:rPr lang="en-US" dirty="0"/>
-              <a:t>The ideas of the last block of lectures, and where they appear today. The calling convention of Lecture 18 becomes small functions with a contract, some of them leaves. The M extension, met in Lectures 05 and 06, gives quotient and remainder for the digits. The processor cycle reminds us that every instruction costs time, so we measure. The screen as memory, from Lecture 20, suggests drawing only what changed. And from Lecture 21: the devices belong to the runtime, to which we ask for a note of a given duration.
+              <a:t>The ideas of the last block of lectures, and where they appear today. The calling convention of Lecture 18 becomes small functions with explicit contracts, some of them leaves. The M extension, whose unsigned division and remainder divu and remu were met in Lectures 05 and 06, yields the digits. The processor cycle of Lecture 19 reminds us that every instruction costs time, hence the measurement. The screen as memory, from Lecture 20, suggests redrawing only what has changed. And from Lecture 21: the devices belong to the runtime, from which a note of a given duration is requested.
 For the lecturer: Lecture 04 comes back too: a digit becomes a character by adding 48, the ASCII code of '0'.</a:t>
             </a:r>
             <a:endParaRPr lang="en-US" dirty="0"/>
@@ -1094,7 +1094,7 @@
           <a:p>
             <a:r>
               <a:rPr lang="en-US" dirty="0"/>
-              <a:t>Where you are going: the title screen with the best score, the game with the score in digits, the game over. Start from a Part 3 that runs; if yours does not, copy the reference file. There are four steps of code today, and the program runs after each one.
+              <a:t>The destination: the title screen with the best score, the game with the score in digits, and the game-over screen. The session begins from a working Part 3; a student whose file does not run copies the reference file. There are four steps of code today, and the program is run after each one.
 For the lecturer: Screenshots produced by tools/tests/verm1_check.py with a scripted player.</a:t>
             </a:r>
             <a:endParaRPr lang="en-US" dirty="0"/>
@@ -1183,7 +1183,7 @@
           <a:p>
             <a:r>
               <a:rPr lang="en-US" dirty="0"/>
-              <a:t>The variable score holds a binary number: 137 is the byte 0x89. The screen wants three characters, the bytes 0x31, 0x33 and 0x37. The conversion is the one you did by hand in Lecture 05: divide by ten, and the remainder is a digit; repeat on the quotient. The digits come out from the right, units first, so they are stored from the last character to the first. A digit becomes a character by adding 48, the ASCII code of the character zero.
+              <a:t>The variable score holds a binary number: 137 is the byte 0x89. The screen requires three characters, the bytes 0x31, 0x33 and 0x37. The conversion is the repeated division of Lecture 05: dividing by ten, the remainder is a digit, and the procedure is repeated on the quotient. The digits emerge from the right, units first, so they are stored from the last character to the first. A digit becomes a character by adding 48, the ASCII code of the character zero, as Lecture 04 established. The distinction between a number and its representation, a theme of the whole course, is here made operational.
 UNDERSTAND NOW: quotient and remainder.
 For the lecturer: The conversion of Lecture 05, done by the program instead of by hand. remu gives the remainder, divu the quotient: two instructions of the M extension.</a:t>
             </a:r>
@@ -1273,7 +1273,7 @@
           <a:p>
             <a:r>
               <a:rPr lang="en-US" dirty="0"/>
-              <a:t>The levels in numbers. For each score, the speed, the frames per step, which is 256 divided by the speed, and the cells per second at thirty frames per second. From 3.75 cells per second at the start to 11.25 from sixteen points on. The frames per step are not always whole numbers, and it is not a problem: at 48 the steps come every five or six frames, 5.33 on average. This is what fixed point gives you.
+              <a:t>The levels, quantified. For each score the table gives the speed, the frames per step, which is 256 divided by the speed, and the cells per second at thirty frames per second: from 3.75 cells per second at the start to 11.25 from sixteen points onwards. The frames per step are not always integers, and this is not a problem: at a speed of 48 the steps occur every five or six frames, 5.33 on average. This fine gradation is precisely what fixed-point representation provides, and no integer speed could achieve it.
 UNDERSTAND NOW: fixed point.
 For the lecturer: 256 divided by the speed gives the frames per step; the frame rate times the speed divided by 256 gives the cells per second. Ask the students for the row of score 2.</a:t>
             </a:r>
@@ -1363,7 +1363,7 @@
           <a:p>
             <a:r>
               <a:rPr lang="en-US" dirty="0"/>
-              <a:t>What does a frame of Part 3 cost? It clears 64,000 pixels and redraws title, score, worm and food, thirty times per second. Yet between two steps nothing changes on the screen, and a step changes very little: the cell the tail left, the old head that becomes body, the new head, and sometimes the food and the score. So remember what changed and draw only that. It works because the frame buffer is memory: the picture stays there by itself.
+              <a:t>What does a frame of Part 3 cost? It clears 64,000 pixels and redraws title, score, worm and food, thirty times per second. Yet between two steps nothing on the screen changes, and a step changes very little: the cell vacated by the tail, the old head that becomes body, the new head, and occasionally the food and the score. The solution is to record what changed and draw only that. It works because the frame buffer is memory, in which the picture persists by itself, the property established in Lecture 20.
 UNDERSTAND NOW: the frame buffer.
 For the lecturer: Lecture 20: the screen is an array of pixels that keeps its content. A worm of 200 cells costs 200 rectangles per frame in Part 3 and three per step in Part 4. This is what the old home computers did, because they had no choice.</a:t>
             </a:r>
@@ -1453,7 +1453,7 @@
           <a:p>
             <a:r>
               <a:rPr lang="en-US" dirty="0"/>
-              <a:t>Six actions. Run the finished game in debug mode and start a game. Read the telemetry for ten seconds. Compare with the numbers of Part 3 that you wrote down at the beginning. Let the worm grow to twenty cells in both versions and read again: in one the cost grows with the worm, in the other it does not. Put a breakpoint on draw_changes and check that it stops once per step. Write the numbers down: they go into the description of your game.
+              <a:t>Six actions. The finished game is run in debug mode and a game started. The telemetry is read for ten seconds and compared with the figures for Part 3 recorded at the start of the session. The worm is grown to twenty cells in both versions and the telemetry read again: in one version the cost grows with the length of the worm, in the other it does not. A breakpoint on draw_changes confirms that it halts once per step. The figures are recorded, since they belong in the description of the game, and they constitute the evidence that the optimisation was worthwhile.
 UNDERSTAND NOW: the processor cycle. USE NOW: the PRG32-QT debugger (used, not studied, in this course).
 For the lecturer: The telemetry counts the instructions of the cartridge, not those of the runtime that fills the rectangles, so the real saving on the board is larger than the count shows: there every pixel also travels over SPI to the display. Do not quote numbers to the students: let them measure.</a:t>
             </a:r>
@@ -1543,7 +1543,7 @@
           <a:p>
             <a:r>
               <a:rPr lang="en-US" dirty="0"/>
-              <a:t>Follow a call with the debugger. Stop on the call to to_decimal and read a0, a1, ra and sp. One step: the PC jumps into the function and ra holds the address of the instruction after the call. Step through: only temporaries change and sp never moves, because it is a leaf. At ret the PC takes the value of ra. Then do the same with draw_text: sp goes down by 16, ra is stored and comes back.
+              <a:t>A procedure call followed in the debugger. Execution halts on the call to to_decimal, and a0, a1, ra and sp are read. One step: the PC jumps into the function and ra holds the address of the instruction following the call. Stepping on, only temporaries change and sp never moves, because the function is a leaf. At ret the PC takes the value of ra. The same procedure with draw_text shows the contrast: sp decreases by 16, ra is stored, and both are restored. The calling convention of Lecture 18 is thus observed instruction by instruction.
 UNDERSTAND NOW: the calling convention. USE NOW: the PRG32-QT debugger (used, not studied, in this course).
 For the lecturer: The calling convention of Lecture 18, watched instruction by instruction. In the listing call appears as jal, or as auipc followed by jalr, and ret as c.jr ra.</a:t>
             </a:r>
@@ -2662,7 +2662,7 @@
                 <a:ea typeface="Calibri" pitchFamily="34" charset="-122"/>
                 <a:cs typeface="Calibri" pitchFamily="34" charset="-120"/>
               </a:rPr>
-              <a:t>22-Computer_Architecture-Verm1_Part_4-Code.pptx</a:t>
+              <a:t>22-Computer_Architecture-Verm1_Part_4-Lab.pptx</a:t>
             </a:r>
             <a:endParaRPr lang="en-US" sz="1300" dirty="0"/>
           </a:p>

--- a/en/slides/22-Computer_Architecture-Verm1_Part_4.pptx
+++ b/en/slides/22-Computer_Architecture-Verm1_Part_4.pptx
@@ -118,7 +118,7 @@
   <p:extLst>
     <p:ext uri="{521415D9-36F7-43E2-AB2F-B90AF26B5E84}">
       <p14:sectionLst xmlns:p14="http://schemas.microsoft.com/office/powerpoint/2010/main">
-        <p14:section name="Opening" id="{c43d4a33-b6a8-5aa9-c6e2-b6f8ab802c30}">
+        <p14:section name="Opening" id="{507008f6-d53d-98fe-3f8f-4169ffe488a2}">
           <p14:sldIdLst>
             <p14:sldId id="256"/>
             <p14:sldId id="257"/>
@@ -126,22 +126,22 @@
             <p14:sldId id="259"/>
           </p14:sldIdLst>
         </p14:section>
-        <p14:section name="Step 1: the score in digits" id="{e558124a-32cb-5cf0-26fb-6f1f9f2f9446}">
+        <p14:section name="Step 1: the score in digits" id="{e9471c7f-ef8e-8e44-b340-32eff89a4aaf}">
           <p14:sldIdLst>
             <p14:sldId id="260"/>
           </p14:sldIdLst>
         </p14:section>
-        <p14:section name="Step 2: levels" id="{030a5ed4-9e87-c748-9abb-5ccb8a30430f}">
+        <p14:section name="Step 2: levels" id="{3fecce2b-4df0-3648-f2c2-c98ee5ad80c3}">
           <p14:sldIdLst>
             <p14:sldId id="261"/>
           </p14:sldIdLst>
         </p14:section>
-        <p14:section name="Step 4: draw only what changed" id="{976e891e-1af2-7e0e-df31-5702a2cf16db}">
+        <p14:section name="Step 4: draw only what changed" id="{9a5af5ca-39c9-f94f-1bcc-ad26eaef6239}">
           <p14:sldIdLst>
             <p14:sldId id="262"/>
           </p14:sldIdLst>
         </p14:section>
-        <p14:section name="Step 5: measure" id="{d9c0c3f4-46b1-bdad-bf50-206c68d2ad00}">
+        <p14:section name="Step 5: measure" id="{ff286b85-afcf-6e84-b8bc-c1af97e94821}">
           <p14:sldIdLst>
             <p14:sldId id="263"/>
             <p14:sldId id="264"/>

--- a/en/slides/22-Computer_Architecture-Verm1_Part_4.pptx
+++ b/en/slides/22-Computer_Architecture-Verm1_Part_4.pptx
@@ -118,7 +118,7 @@
   <p:extLst>
     <p:ext uri="{521415D9-36F7-43E2-AB2F-B90AF26B5E84}">
       <p14:sectionLst xmlns:p14="http://schemas.microsoft.com/office/powerpoint/2010/main">
-        <p14:section name="Opening" id="{507008f6-d53d-98fe-3f8f-4169ffe488a2}">
+        <p14:section name="Opening" id="{e23f504f-a6db-02a8-9ffa-b09134da7377}">
           <p14:sldIdLst>
             <p14:sldId id="256"/>
             <p14:sldId id="257"/>
@@ -126,22 +126,22 @@
             <p14:sldId id="259"/>
           </p14:sldIdLst>
         </p14:section>
-        <p14:section name="Step 1: the score in digits" id="{e9471c7f-ef8e-8e44-b340-32eff89a4aaf}">
+        <p14:section name="Step 1: the score in digits" id="{1ceaf6bb-c960-e56b-b09b-ae5fb902644a}">
           <p14:sldIdLst>
             <p14:sldId id="260"/>
           </p14:sldIdLst>
         </p14:section>
-        <p14:section name="Step 2: levels" id="{3fecce2b-4df0-3648-f2c2-c98ee5ad80c3}">
+        <p14:section name="Step 2: levels" id="{bb07bf93-fdb6-42ad-2c76-c2686ab48af7}">
           <p14:sldIdLst>
             <p14:sldId id="261"/>
           </p14:sldIdLst>
         </p14:section>
-        <p14:section name="Step 4: draw only what changed" id="{9a5af5ca-39c9-f94f-1bcc-ad26eaef6239}">
+        <p14:section name="Step 4: draw only what changed" id="{5da68c70-8994-5021-a0a8-bc62986d3ed7}">
           <p14:sldIdLst>
             <p14:sldId id="262"/>
           </p14:sldIdLst>
         </p14:section>
-        <p14:section name="Step 5: measure" id="{ff286b85-afcf-6e84-b8bc-c1af97e94821}">
+        <p14:section name="Step 5: measure" id="{87dc325e-23cf-78b1-a995-51e1f6fd62ec}">
           <p14:sldIdLst>
             <p14:sldId id="263"/>
             <p14:sldId id="264"/>
@@ -557,6 +557,7 @@
               <a:t>The fourth and final tutorial completes Verm1. At the end of Part 3 the game was complete in its rules; today it becomes complete as a program. The score is written in decimal digits, the worm accelerates, there are two sounds, and the screen is redrawn only where it changes. Knuth's sentence on the cover justifies the order of the work: first the game was made correct, and only now, with a measurement in hand, is it made fast. Optimisation without measurement is guesswork, and the tutorial ends by measuring the effect of its own changes.
 Learning status: UNDERSTAND NOW, by the end of this lecture you explain it, trace it and apply it on your own; USE NOW, you follow and use the recipe today; how it works inside is explained later, or is not part of the course; UNDERSTAND LATER, recognise the name and what it is for; a later lecture explains it. A slide without a badge is context: a story, an example, a question, an exercise.
 Learning status of this lecture. UNDERSTAND NOW: quotient and remainder; characters and strings; fixed point; the calling convention; arrays in memory; finite-state machines; the frame buffer; the processor cycle. USE NOW: the PRG32 tools, the PRG32-QT debugger (used, not studied, in this course). UNDERSTAND LATER: nothing. A slide without a badge is context: a story, an example, a question, an exercise.
+Roadmap. Today's outcomes: (1) turn a number into decimal digits with divu and remu; (2) draw only what changed, with a dirty flag; (3) finish the game: levels, sound, speed. Builds on: characters and strings (Lecture 04); fixed point (Lecture 06); the calling convention (Lecture 18); arrays in memory (Lecture 04); finite-state machines (Lecture 13). Next: Lecture 23, Verm1 on the Cartridge Store.
 For the lecturer: Fourth project tutorial. It uses Lectures 18 to 21: the registers by convention, the stack, multiplication and division (18), the processor cycle and the cost of an instruction (19), the frame buffer and what drawing costs (20), input, sound and the runtime as the owner of the devices (21). The reference file is verm1/verm1_part4.S. Knuth's sentence is the right motto: the game was made to work in Part 3, and only now, with a measure in hand, do we make it fast.</a:t>
             </a:r>
             <a:endParaRPr lang="en-US" dirty="0"/>
@@ -828,7 +829,7 @@
             <a:r>
               <a:rPr lang="en-US" dirty="0"/>
               <a:t>Verm1 is finished: about six hundred lines of RISC-V assembly, every one written by the student. It began as three functions that merely return and grew one runnable step at a time, and every part of the course is present in it: numbers, logic, state, memory, procedure calls, pixels and devices. One thing remains: a program that only its author can run is half finished. The next lecture gives it a name, an icon and credits, and publishes it.
-Learning status, recap. UNDERSTAND NOW: quotient and remainder; characters and strings; fixed point; the calling convention; arrays in memory; finite-state machines; the frame buffer; the processor cycle. USE NOW: the PRG32 tools, the PRG32-QT debugger (used, not studied, in this course). UNDERSTAND LATER: nothing. A slide without a badge is context: a story, an example, a question, an exercise.
+Learning status, recap. UNDERSTAND NOW: quotient and remainder; characters and strings; fixed point; the calling convention; arrays in memory; finite-state machines; the frame buffer; the processor cycle. USE NOW: the PRG32 tools, the PRG32-QT debugger (used, not studied, in this course). UNDERSTAND LATER: nothing. A slide without a badge is context: a story, an example, a question, an exercise. Closing thread: Verm1 is finished: every topic of the course has a line in it. Next: giving it a name, an icon and a place on the Store. Exit ticket (two to four minutes, alone, on paper): 1. to_decimal receives 205. Show how remu and divu by 10 give its three digits, and why it stores the bytes '2', '0', '5' rather than the numbers 2, 0, 5. 2. Why does verm1_draw redraw the map only when dirty is set? What would the player see if update forgot to set it after a step?
 For the lecturer: Ask the students to bring their own variant to Lecture 23: the bundle they prepare should be of their game, not of the reference.</a:t>
             </a:r>
             <a:endParaRPr lang="en-US" dirty="0"/>
